--- a/lecons/F5/50_F5_M3_L43_Concept_of_Rural_Settlement.pptx
+++ b/lecons/F5/50_F5_M3_L43_Concept_of_Rural_Settlement.pptx
@@ -12770,7 +12770,7 @@
         <p:spPr>
           <a:xfrm>
             <a:off x="0" y="658368"/>
-            <a:ext cx="3840480" cy="5833872"/>
+            <a:ext cx="5120640" cy="5833872"/>
           </a:xfrm>
           <a:prstGeom prst="rect">
             <a:avLst/>
@@ -12785,8 +12785,8 @@
         </p:nvSpPr>
         <p:spPr>
           <a:xfrm>
-            <a:off x="4069080" y="1005840"/>
-            <a:ext cx="7802575" cy="731520"/>
+            <a:off x="5349240" y="1005840"/>
+            <a:ext cx="6522415" cy="731520"/>
           </a:xfrm>
           <a:prstGeom prst="rect">
             <a:avLst/>
@@ -12826,8 +12826,8 @@
         </p:nvSpPr>
         <p:spPr>
           <a:xfrm>
-            <a:off x="4069080" y="1783080"/>
-            <a:ext cx="7802575" cy="4663440"/>
+            <a:off x="5349240" y="1783080"/>
+            <a:ext cx="6522415" cy="4663440"/>
           </a:xfrm>
           <a:prstGeom prst="rect">
             <a:avLst/>
@@ -12846,7 +12846,7 @@
               <a:buNone/>
             </a:pPr>
             <a:r>
-              <a:rPr lang="en-US" sz="4000" b="1" dirty="0">
+              <a:rPr lang="en-US" sz="3200" b="1" dirty="0">
                 <a:solidFill>
                   <a:srgbClr val="111111"/>
                 </a:solidFill>
@@ -12856,7 +12856,7 @@
               </a:rPr>
               <a:t>Topic: The Development of Settlements and their Implications</a:t>
             </a:r>
-            <a:endParaRPr lang="en-US" sz="4000" dirty="0"/>
+            <a:endParaRPr lang="en-US" sz="3200" dirty="0"/>
           </a:p>
           <a:p>
             <a:pPr algn="l" indent="0" marL="0">
@@ -12866,7 +12866,7 @@
               <a:buNone/>
             </a:pPr>
             <a:r>
-              <a:rPr lang="en-US" sz="4000" b="1" dirty="0">
+              <a:rPr lang="en-US" sz="3200" b="1" dirty="0">
                 <a:solidFill>
                   <a:srgbClr val="111111"/>
                 </a:solidFill>
@@ -12876,7 +12876,7 @@
               </a:rPr>
               <a:t>Sub-topic: Rural Settlements, their Morphology and Implications on the Environment</a:t>
             </a:r>
-            <a:endParaRPr lang="en-US" sz="4000" dirty="0"/>
+            <a:endParaRPr lang="en-US" sz="3200" dirty="0"/>
           </a:p>
           <a:p>
             <a:pPr algn="l" indent="0" marL="0">
@@ -12886,7 +12886,7 @@
               <a:buNone/>
             </a:pPr>
             <a:r>
-              <a:rPr lang="en-US" sz="4000" b="1" dirty="0">
+              <a:rPr lang="en-US" sz="3200" b="1" dirty="0">
                 <a:solidFill>
                   <a:srgbClr val="990011"/>
                 </a:solidFill>
@@ -12896,7 +12896,7 @@
               </a:rPr>
               <a:t>Lesson 43: Concept of Rural Settlement</a:t>
             </a:r>
-            <a:endParaRPr lang="en-US" sz="4000" dirty="0"/>
+            <a:endParaRPr lang="en-US" sz="3200" dirty="0"/>
           </a:p>
         </p:txBody>
       </p:sp>
